--- a/奇異恩典_v2.pptx
+++ b/奇異恩典_v2.pptx
@@ -158,7 +158,7 @@
           <a:lstStyle/>
           <a:p>
             <a:r>
-              <a:rPr lang="en-US" altLang="zh-TW" smtClean="0"/>
+              <a:rPr lang="en-US" altLang="zh-TW"/>
               <a:t>Click to edit Master title style</a:t>
             </a:r>
             <a:endParaRPr lang="zh-TW" altLang="en-US"/>
@@ -277,7 +277,7 @@
           </a:lstStyle>
           <a:p>
             <a:r>
-              <a:rPr lang="en-US" altLang="zh-TW" smtClean="0"/>
+              <a:rPr lang="en-US" altLang="zh-TW"/>
               <a:t>Click to edit Master subtitle style</a:t>
             </a:r>
             <a:endParaRPr lang="zh-TW" altLang="en-US"/>
@@ -301,7 +301,7 @@
           <a:p>
             <a:fld id="{6709A719-A21C-496B-A9A9-66BDEF500D2B}" type="datetimeFigureOut">
               <a:rPr lang="vi-VN" smtClean="0"/>
-              <a:t>22/10/2022</a:t>
+              <a:t>22/11/2025</a:t>
             </a:fld>
             <a:endParaRPr lang="vi-VN"/>
           </a:p>
@@ -395,7 +395,7 @@
           <a:lstStyle/>
           <a:p>
             <a:r>
-              <a:rPr lang="en-US" altLang="zh-TW" smtClean="0"/>
+              <a:rPr lang="en-US" altLang="zh-TW"/>
               <a:t>Click to edit Master title style</a:t>
             </a:r>
             <a:endParaRPr lang="zh-TW" altLang="en-US"/>
@@ -419,35 +419,35 @@
           <a:p>
             <a:pPr lvl="0"/>
             <a:r>
-              <a:rPr lang="en-US" altLang="zh-TW" smtClean="0"/>
+              <a:rPr lang="en-US" altLang="zh-TW"/>
               <a:t>Edit Master text styles</a:t>
             </a:r>
           </a:p>
           <a:p>
             <a:pPr lvl="1"/>
             <a:r>
-              <a:rPr lang="en-US" altLang="zh-TW" smtClean="0"/>
+              <a:rPr lang="en-US" altLang="zh-TW"/>
               <a:t>Second level</a:t>
             </a:r>
           </a:p>
           <a:p>
             <a:pPr lvl="2"/>
             <a:r>
-              <a:rPr lang="en-US" altLang="zh-TW" smtClean="0"/>
+              <a:rPr lang="en-US" altLang="zh-TW"/>
               <a:t>Third level</a:t>
             </a:r>
           </a:p>
           <a:p>
             <a:pPr lvl="3"/>
             <a:r>
-              <a:rPr lang="en-US" altLang="zh-TW" smtClean="0"/>
+              <a:rPr lang="en-US" altLang="zh-TW"/>
               <a:t>Fourth level</a:t>
             </a:r>
           </a:p>
           <a:p>
             <a:pPr lvl="4"/>
             <a:r>
-              <a:rPr lang="en-US" altLang="zh-TW" smtClean="0"/>
+              <a:rPr lang="en-US" altLang="zh-TW"/>
               <a:t>Fifth level</a:t>
             </a:r>
             <a:endParaRPr lang="zh-TW" altLang="en-US"/>
@@ -471,7 +471,7 @@
           <a:p>
             <a:fld id="{6709A719-A21C-496B-A9A9-66BDEF500D2B}" type="datetimeFigureOut">
               <a:rPr lang="vi-VN" smtClean="0"/>
-              <a:t>22/10/2022</a:t>
+              <a:t>22/11/2025</a:t>
             </a:fld>
             <a:endParaRPr lang="vi-VN"/>
           </a:p>
@@ -570,7 +570,7 @@
           <a:lstStyle/>
           <a:p>
             <a:r>
-              <a:rPr lang="en-US" altLang="zh-TW" smtClean="0"/>
+              <a:rPr lang="en-US" altLang="zh-TW"/>
               <a:t>Click to edit Master title style</a:t>
             </a:r>
             <a:endParaRPr lang="zh-TW" altLang="en-US"/>
@@ -599,35 +599,35 @@
           <a:p>
             <a:pPr lvl="0"/>
             <a:r>
-              <a:rPr lang="en-US" altLang="zh-TW" smtClean="0"/>
+              <a:rPr lang="en-US" altLang="zh-TW"/>
               <a:t>Edit Master text styles</a:t>
             </a:r>
           </a:p>
           <a:p>
             <a:pPr lvl="1"/>
             <a:r>
-              <a:rPr lang="en-US" altLang="zh-TW" smtClean="0"/>
+              <a:rPr lang="en-US" altLang="zh-TW"/>
               <a:t>Second level</a:t>
             </a:r>
           </a:p>
           <a:p>
             <a:pPr lvl="2"/>
             <a:r>
-              <a:rPr lang="en-US" altLang="zh-TW" smtClean="0"/>
+              <a:rPr lang="en-US" altLang="zh-TW"/>
               <a:t>Third level</a:t>
             </a:r>
           </a:p>
           <a:p>
             <a:pPr lvl="3"/>
             <a:r>
-              <a:rPr lang="en-US" altLang="zh-TW" smtClean="0"/>
+              <a:rPr lang="en-US" altLang="zh-TW"/>
               <a:t>Fourth level</a:t>
             </a:r>
           </a:p>
           <a:p>
             <a:pPr lvl="4"/>
             <a:r>
-              <a:rPr lang="en-US" altLang="zh-TW" smtClean="0"/>
+              <a:rPr lang="en-US" altLang="zh-TW"/>
               <a:t>Fifth level</a:t>
             </a:r>
             <a:endParaRPr lang="zh-TW" altLang="en-US"/>
@@ -651,7 +651,7 @@
           <a:p>
             <a:fld id="{6709A719-A21C-496B-A9A9-66BDEF500D2B}" type="datetimeFigureOut">
               <a:rPr lang="vi-VN" smtClean="0"/>
-              <a:t>22/10/2022</a:t>
+              <a:t>22/11/2025</a:t>
             </a:fld>
             <a:endParaRPr lang="vi-VN"/>
           </a:p>
@@ -745,7 +745,7 @@
           <a:lstStyle/>
           <a:p>
             <a:r>
-              <a:rPr lang="en-US" altLang="zh-TW" smtClean="0"/>
+              <a:rPr lang="en-US" altLang="zh-TW"/>
               <a:t>Click to edit Master title style</a:t>
             </a:r>
             <a:endParaRPr lang="zh-TW" altLang="en-US"/>
@@ -769,35 +769,35 @@
           <a:p>
             <a:pPr lvl="0"/>
             <a:r>
-              <a:rPr lang="en-US" altLang="zh-TW" smtClean="0"/>
+              <a:rPr lang="en-US" altLang="zh-TW"/>
               <a:t>Edit Master text styles</a:t>
             </a:r>
           </a:p>
           <a:p>
             <a:pPr lvl="1"/>
             <a:r>
-              <a:rPr lang="en-US" altLang="zh-TW" smtClean="0"/>
+              <a:rPr lang="en-US" altLang="zh-TW"/>
               <a:t>Second level</a:t>
             </a:r>
           </a:p>
           <a:p>
             <a:pPr lvl="2"/>
             <a:r>
-              <a:rPr lang="en-US" altLang="zh-TW" smtClean="0"/>
+              <a:rPr lang="en-US" altLang="zh-TW"/>
               <a:t>Third level</a:t>
             </a:r>
           </a:p>
           <a:p>
             <a:pPr lvl="3"/>
             <a:r>
-              <a:rPr lang="en-US" altLang="zh-TW" smtClean="0"/>
+              <a:rPr lang="en-US" altLang="zh-TW"/>
               <a:t>Fourth level</a:t>
             </a:r>
           </a:p>
           <a:p>
             <a:pPr lvl="4"/>
             <a:r>
-              <a:rPr lang="en-US" altLang="zh-TW" smtClean="0"/>
+              <a:rPr lang="en-US" altLang="zh-TW"/>
               <a:t>Fifth level</a:t>
             </a:r>
             <a:endParaRPr lang="zh-TW" altLang="en-US"/>
@@ -821,7 +821,7 @@
           <a:p>
             <a:fld id="{6709A719-A21C-496B-A9A9-66BDEF500D2B}" type="datetimeFigureOut">
               <a:rPr lang="vi-VN" smtClean="0"/>
-              <a:t>22/10/2022</a:t>
+              <a:t>22/11/2025</a:t>
             </a:fld>
             <a:endParaRPr lang="vi-VN"/>
           </a:p>
@@ -924,7 +924,7 @@
           </a:lstStyle>
           <a:p>
             <a:r>
-              <a:rPr lang="en-US" altLang="zh-TW" smtClean="0"/>
+              <a:rPr lang="en-US" altLang="zh-TW"/>
               <a:t>Click to edit Master title style</a:t>
             </a:r>
             <a:endParaRPr lang="zh-TW" altLang="en-US"/>
@@ -1044,7 +1044,7 @@
           <a:p>
             <a:pPr lvl="0"/>
             <a:r>
-              <a:rPr lang="en-US" altLang="zh-TW" smtClean="0"/>
+              <a:rPr lang="en-US" altLang="zh-TW"/>
               <a:t>Edit Master text styles</a:t>
             </a:r>
           </a:p>
@@ -1067,7 +1067,7 @@
           <a:p>
             <a:fld id="{6709A719-A21C-496B-A9A9-66BDEF500D2B}" type="datetimeFigureOut">
               <a:rPr lang="vi-VN" smtClean="0"/>
-              <a:t>22/10/2022</a:t>
+              <a:t>22/11/2025</a:t>
             </a:fld>
             <a:endParaRPr lang="vi-VN"/>
           </a:p>
@@ -1161,7 +1161,7 @@
           <a:lstStyle/>
           <a:p>
             <a:r>
-              <a:rPr lang="en-US" altLang="zh-TW" smtClean="0"/>
+              <a:rPr lang="en-US" altLang="zh-TW"/>
               <a:t>Click to edit Master title style</a:t>
             </a:r>
             <a:endParaRPr lang="zh-TW" altLang="en-US"/>
@@ -1218,35 +1218,35 @@
           <a:p>
             <a:pPr lvl="0"/>
             <a:r>
-              <a:rPr lang="en-US" altLang="zh-TW" smtClean="0"/>
+              <a:rPr lang="en-US" altLang="zh-TW"/>
               <a:t>Edit Master text styles</a:t>
             </a:r>
           </a:p>
           <a:p>
             <a:pPr lvl="1"/>
             <a:r>
-              <a:rPr lang="en-US" altLang="zh-TW" smtClean="0"/>
+              <a:rPr lang="en-US" altLang="zh-TW"/>
               <a:t>Second level</a:t>
             </a:r>
           </a:p>
           <a:p>
             <a:pPr lvl="2"/>
             <a:r>
-              <a:rPr lang="en-US" altLang="zh-TW" smtClean="0"/>
+              <a:rPr lang="en-US" altLang="zh-TW"/>
               <a:t>Third level</a:t>
             </a:r>
           </a:p>
           <a:p>
             <a:pPr lvl="3"/>
             <a:r>
-              <a:rPr lang="en-US" altLang="zh-TW" smtClean="0"/>
+              <a:rPr lang="en-US" altLang="zh-TW"/>
               <a:t>Fourth level</a:t>
             </a:r>
           </a:p>
           <a:p>
             <a:pPr lvl="4"/>
             <a:r>
-              <a:rPr lang="en-US" altLang="zh-TW" smtClean="0"/>
+              <a:rPr lang="en-US" altLang="zh-TW"/>
               <a:t>Fifth level</a:t>
             </a:r>
             <a:endParaRPr lang="zh-TW" altLang="en-US"/>
@@ -1303,35 +1303,35 @@
           <a:p>
             <a:pPr lvl="0"/>
             <a:r>
-              <a:rPr lang="en-US" altLang="zh-TW" smtClean="0"/>
+              <a:rPr lang="en-US" altLang="zh-TW"/>
               <a:t>Edit Master text styles</a:t>
             </a:r>
           </a:p>
           <a:p>
             <a:pPr lvl="1"/>
             <a:r>
-              <a:rPr lang="en-US" altLang="zh-TW" smtClean="0"/>
+              <a:rPr lang="en-US" altLang="zh-TW"/>
               <a:t>Second level</a:t>
             </a:r>
           </a:p>
           <a:p>
             <a:pPr lvl="2"/>
             <a:r>
-              <a:rPr lang="en-US" altLang="zh-TW" smtClean="0"/>
+              <a:rPr lang="en-US" altLang="zh-TW"/>
               <a:t>Third level</a:t>
             </a:r>
           </a:p>
           <a:p>
             <a:pPr lvl="3"/>
             <a:r>
-              <a:rPr lang="en-US" altLang="zh-TW" smtClean="0"/>
+              <a:rPr lang="en-US" altLang="zh-TW"/>
               <a:t>Fourth level</a:t>
             </a:r>
           </a:p>
           <a:p>
             <a:pPr lvl="4"/>
             <a:r>
-              <a:rPr lang="en-US" altLang="zh-TW" smtClean="0"/>
+              <a:rPr lang="en-US" altLang="zh-TW"/>
               <a:t>Fifth level</a:t>
             </a:r>
             <a:endParaRPr lang="zh-TW" altLang="en-US"/>
@@ -1355,7 +1355,7 @@
           <a:p>
             <a:fld id="{6709A719-A21C-496B-A9A9-66BDEF500D2B}" type="datetimeFigureOut">
               <a:rPr lang="vi-VN" smtClean="0"/>
-              <a:t>22/10/2022</a:t>
+              <a:t>22/11/2025</a:t>
             </a:fld>
             <a:endParaRPr lang="vi-VN"/>
           </a:p>
@@ -1453,7 +1453,7 @@
           </a:lstStyle>
           <a:p>
             <a:r>
-              <a:rPr lang="en-US" altLang="zh-TW" smtClean="0"/>
+              <a:rPr lang="en-US" altLang="zh-TW"/>
               <a:t>Click to edit Master title style</a:t>
             </a:r>
             <a:endParaRPr lang="zh-TW" altLang="en-US"/>
@@ -1519,7 +1519,7 @@
           <a:p>
             <a:pPr lvl="0"/>
             <a:r>
-              <a:rPr lang="en-US" altLang="zh-TW" smtClean="0"/>
+              <a:rPr lang="en-US" altLang="zh-TW"/>
               <a:t>Edit Master text styles</a:t>
             </a:r>
           </a:p>
@@ -1575,35 +1575,35 @@
           <a:p>
             <a:pPr lvl="0"/>
             <a:r>
-              <a:rPr lang="en-US" altLang="zh-TW" smtClean="0"/>
+              <a:rPr lang="en-US" altLang="zh-TW"/>
               <a:t>Edit Master text styles</a:t>
             </a:r>
           </a:p>
           <a:p>
             <a:pPr lvl="1"/>
             <a:r>
-              <a:rPr lang="en-US" altLang="zh-TW" smtClean="0"/>
+              <a:rPr lang="en-US" altLang="zh-TW"/>
               <a:t>Second level</a:t>
             </a:r>
           </a:p>
           <a:p>
             <a:pPr lvl="2"/>
             <a:r>
-              <a:rPr lang="en-US" altLang="zh-TW" smtClean="0"/>
+              <a:rPr lang="en-US" altLang="zh-TW"/>
               <a:t>Third level</a:t>
             </a:r>
           </a:p>
           <a:p>
             <a:pPr lvl="3"/>
             <a:r>
-              <a:rPr lang="en-US" altLang="zh-TW" smtClean="0"/>
+              <a:rPr lang="en-US" altLang="zh-TW"/>
               <a:t>Fourth level</a:t>
             </a:r>
           </a:p>
           <a:p>
             <a:pPr lvl="4"/>
             <a:r>
-              <a:rPr lang="en-US" altLang="zh-TW" smtClean="0"/>
+              <a:rPr lang="en-US" altLang="zh-TW"/>
               <a:t>Fifth level</a:t>
             </a:r>
             <a:endParaRPr lang="zh-TW" altLang="en-US"/>
@@ -1669,7 +1669,7 @@
           <a:p>
             <a:pPr lvl="0"/>
             <a:r>
-              <a:rPr lang="en-US" altLang="zh-TW" smtClean="0"/>
+              <a:rPr lang="en-US" altLang="zh-TW"/>
               <a:t>Edit Master text styles</a:t>
             </a:r>
           </a:p>
@@ -1725,35 +1725,35 @@
           <a:p>
             <a:pPr lvl="0"/>
             <a:r>
-              <a:rPr lang="en-US" altLang="zh-TW" smtClean="0"/>
+              <a:rPr lang="en-US" altLang="zh-TW"/>
               <a:t>Edit Master text styles</a:t>
             </a:r>
           </a:p>
           <a:p>
             <a:pPr lvl="1"/>
             <a:r>
-              <a:rPr lang="en-US" altLang="zh-TW" smtClean="0"/>
+              <a:rPr lang="en-US" altLang="zh-TW"/>
               <a:t>Second level</a:t>
             </a:r>
           </a:p>
           <a:p>
             <a:pPr lvl="2"/>
             <a:r>
-              <a:rPr lang="en-US" altLang="zh-TW" smtClean="0"/>
+              <a:rPr lang="en-US" altLang="zh-TW"/>
               <a:t>Third level</a:t>
             </a:r>
           </a:p>
           <a:p>
             <a:pPr lvl="3"/>
             <a:r>
-              <a:rPr lang="en-US" altLang="zh-TW" smtClean="0"/>
+              <a:rPr lang="en-US" altLang="zh-TW"/>
               <a:t>Fourth level</a:t>
             </a:r>
           </a:p>
           <a:p>
             <a:pPr lvl="4"/>
             <a:r>
-              <a:rPr lang="en-US" altLang="zh-TW" smtClean="0"/>
+              <a:rPr lang="en-US" altLang="zh-TW"/>
               <a:t>Fifth level</a:t>
             </a:r>
             <a:endParaRPr lang="zh-TW" altLang="en-US"/>
@@ -1777,7 +1777,7 @@
           <a:p>
             <a:fld id="{6709A719-A21C-496B-A9A9-66BDEF500D2B}" type="datetimeFigureOut">
               <a:rPr lang="vi-VN" smtClean="0"/>
-              <a:t>22/10/2022</a:t>
+              <a:t>22/11/2025</a:t>
             </a:fld>
             <a:endParaRPr lang="vi-VN"/>
           </a:p>
@@ -1871,7 +1871,7 @@
           <a:lstStyle/>
           <a:p>
             <a:r>
-              <a:rPr lang="en-US" altLang="zh-TW" smtClean="0"/>
+              <a:rPr lang="en-US" altLang="zh-TW"/>
               <a:t>Click to edit Master title style</a:t>
             </a:r>
             <a:endParaRPr lang="zh-TW" altLang="en-US"/>
@@ -1895,7 +1895,7 @@
           <a:p>
             <a:fld id="{6709A719-A21C-496B-A9A9-66BDEF500D2B}" type="datetimeFigureOut">
               <a:rPr lang="vi-VN" smtClean="0"/>
-              <a:t>22/10/2022</a:t>
+              <a:t>22/11/2025</a:t>
             </a:fld>
             <a:endParaRPr lang="vi-VN"/>
           </a:p>
@@ -1990,7 +1990,7 @@
           <a:p>
             <a:fld id="{6709A719-A21C-496B-A9A9-66BDEF500D2B}" type="datetimeFigureOut">
               <a:rPr lang="vi-VN" smtClean="0"/>
-              <a:t>22/10/2022</a:t>
+              <a:t>22/11/2025</a:t>
             </a:fld>
             <a:endParaRPr lang="vi-VN"/>
           </a:p>
@@ -2093,7 +2093,7 @@
           </a:lstStyle>
           <a:p>
             <a:r>
-              <a:rPr lang="en-US" altLang="zh-TW" smtClean="0"/>
+              <a:rPr lang="en-US" altLang="zh-TW"/>
               <a:t>Click to edit Master title style</a:t>
             </a:r>
             <a:endParaRPr lang="zh-TW" altLang="en-US"/>
@@ -2150,35 +2150,35 @@
           <a:p>
             <a:pPr lvl="0"/>
             <a:r>
-              <a:rPr lang="en-US" altLang="zh-TW" smtClean="0"/>
+              <a:rPr lang="en-US" altLang="zh-TW"/>
               <a:t>Edit Master text styles</a:t>
             </a:r>
           </a:p>
           <a:p>
             <a:pPr lvl="1"/>
             <a:r>
-              <a:rPr lang="en-US" altLang="zh-TW" smtClean="0"/>
+              <a:rPr lang="en-US" altLang="zh-TW"/>
               <a:t>Second level</a:t>
             </a:r>
           </a:p>
           <a:p>
             <a:pPr lvl="2"/>
             <a:r>
-              <a:rPr lang="en-US" altLang="zh-TW" smtClean="0"/>
+              <a:rPr lang="en-US" altLang="zh-TW"/>
               <a:t>Third level</a:t>
             </a:r>
           </a:p>
           <a:p>
             <a:pPr lvl="3"/>
             <a:r>
-              <a:rPr lang="en-US" altLang="zh-TW" smtClean="0"/>
+              <a:rPr lang="en-US" altLang="zh-TW"/>
               <a:t>Fourth level</a:t>
             </a:r>
           </a:p>
           <a:p>
             <a:pPr lvl="4"/>
             <a:r>
-              <a:rPr lang="en-US" altLang="zh-TW" smtClean="0"/>
+              <a:rPr lang="en-US" altLang="zh-TW"/>
               <a:t>Fifth level</a:t>
             </a:r>
             <a:endParaRPr lang="zh-TW" altLang="en-US"/>
@@ -2244,7 +2244,7 @@
           <a:p>
             <a:pPr lvl="0"/>
             <a:r>
-              <a:rPr lang="en-US" altLang="zh-TW" smtClean="0"/>
+              <a:rPr lang="en-US" altLang="zh-TW"/>
               <a:t>Edit Master text styles</a:t>
             </a:r>
           </a:p>
@@ -2267,7 +2267,7 @@
           <a:p>
             <a:fld id="{6709A719-A21C-496B-A9A9-66BDEF500D2B}" type="datetimeFigureOut">
               <a:rPr lang="vi-VN" smtClean="0"/>
-              <a:t>22/10/2022</a:t>
+              <a:t>22/11/2025</a:t>
             </a:fld>
             <a:endParaRPr lang="vi-VN"/>
           </a:p>
@@ -2370,7 +2370,7 @@
           </a:lstStyle>
           <a:p>
             <a:r>
-              <a:rPr lang="en-US" altLang="zh-TW" smtClean="0"/>
+              <a:rPr lang="en-US" altLang="zh-TW"/>
               <a:t>Click to edit Master title style</a:t>
             </a:r>
             <a:endParaRPr lang="zh-TW" altLang="en-US"/>
@@ -2435,7 +2435,7 @@
           </a:lstStyle>
           <a:p>
             <a:r>
-              <a:rPr lang="en-US" altLang="zh-TW" smtClean="0"/>
+              <a:rPr lang="en-US" altLang="zh-TW"/>
               <a:t>Click icon to add picture</a:t>
             </a:r>
             <a:endParaRPr lang="zh-TW" altLang="en-US"/>
@@ -2501,7 +2501,7 @@
           <a:p>
             <a:pPr lvl="0"/>
             <a:r>
-              <a:rPr lang="en-US" altLang="zh-TW" smtClean="0"/>
+              <a:rPr lang="en-US" altLang="zh-TW"/>
               <a:t>Edit Master text styles</a:t>
             </a:r>
           </a:p>
@@ -2524,7 +2524,7 @@
           <a:p>
             <a:fld id="{6709A719-A21C-496B-A9A9-66BDEF500D2B}" type="datetimeFigureOut">
               <a:rPr lang="vi-VN" smtClean="0"/>
-              <a:t>22/10/2022</a:t>
+              <a:t>22/11/2025</a:t>
             </a:fld>
             <a:endParaRPr lang="vi-VN"/>
           </a:p>
@@ -2638,10 +2638,9 @@
           <a:lstStyle/>
           <a:p>
             <a:r>
-              <a:rPr lang="zh-TW" altLang="en-US" smtClean="0"/>
+              <a:rPr lang="zh-TW" altLang="en-US"/>
               <a:t>按一下以編輯母片標題樣式</a:t>
             </a:r>
-            <a:endParaRPr lang="zh-TW" altLang="en-US"/>
           </a:p>
         </p:txBody>
       </p:sp>
@@ -2672,38 +2671,37 @@
           <a:p>
             <a:pPr lvl="0"/>
             <a:r>
-              <a:rPr lang="zh-TW" altLang="en-US" smtClean="0"/>
+              <a:rPr lang="zh-TW" altLang="en-US"/>
               <a:t>按一下以編輯母片文字樣式</a:t>
             </a:r>
           </a:p>
           <a:p>
             <a:pPr lvl="1"/>
             <a:r>
-              <a:rPr lang="zh-TW" altLang="en-US" smtClean="0"/>
+              <a:rPr lang="zh-TW" altLang="en-US"/>
               <a:t>第二層</a:t>
             </a:r>
           </a:p>
           <a:p>
             <a:pPr lvl="2"/>
             <a:r>
-              <a:rPr lang="zh-TW" altLang="en-US" smtClean="0"/>
+              <a:rPr lang="zh-TW" altLang="en-US"/>
               <a:t>第三層</a:t>
             </a:r>
           </a:p>
           <a:p>
             <a:pPr lvl="3"/>
             <a:r>
-              <a:rPr lang="zh-TW" altLang="en-US" smtClean="0"/>
+              <a:rPr lang="zh-TW" altLang="en-US"/>
               <a:t>第四層</a:t>
             </a:r>
           </a:p>
           <a:p>
             <a:pPr lvl="4"/>
             <a:r>
-              <a:rPr lang="zh-TW" altLang="en-US" smtClean="0"/>
+              <a:rPr lang="zh-TW" altLang="en-US"/>
               <a:t>第五層</a:t>
             </a:r>
-            <a:endParaRPr lang="zh-TW" altLang="en-US"/>
           </a:p>
         </p:txBody>
       </p:sp>
@@ -2742,7 +2740,7 @@
           <a:p>
             <a:fld id="{6709A719-A21C-496B-A9A9-66BDEF500D2B}" type="datetimeFigureOut">
               <a:rPr lang="vi-VN" smtClean="0"/>
-              <a:t>22/10/2022</a:t>
+              <a:t>22/11/2025</a:t>
             </a:fld>
             <a:endParaRPr lang="vi-VN"/>
           </a:p>
@@ -3129,7 +3127,7 @@
         </p:nvSpPr>
         <p:spPr>
           <a:xfrm>
-            <a:off x="0" y="2756925"/>
+            <a:off x="0" y="2553725"/>
             <a:ext cx="12192000" cy="1143000"/>
           </a:xfrm>
         </p:spPr>
@@ -3271,15 +3269,7 @@
                   <a:srgbClr val="000066"/>
                 </a:solidFill>
               </a:rPr>
-              <a:t>( 1 </a:t>
-            </a:r>
-            <a:r>
-              <a:rPr lang="en-US" sz="4800" b="1" dirty="0" smtClean="0">
-                <a:solidFill>
-                  <a:srgbClr val="000066"/>
-                </a:solidFill>
-              </a:rPr>
-              <a:t>/ 4 )</a:t>
+              <a:t>( 1 / 4 )</a:t>
             </a:r>
             <a:endParaRPr lang="vi-VN" sz="4800" b="1" dirty="0">
               <a:solidFill>
@@ -3523,23 +3513,7 @@
                   <a:srgbClr val="000066"/>
                 </a:solidFill>
               </a:rPr>
-              <a:t>( </a:t>
-            </a:r>
-            <a:r>
-              <a:rPr lang="en-US" sz="4800" b="1" dirty="0" smtClean="0">
-                <a:solidFill>
-                  <a:srgbClr val="000066"/>
-                </a:solidFill>
-              </a:rPr>
-              <a:t>2 </a:t>
-            </a:r>
-            <a:r>
-              <a:rPr lang="en-US" sz="4800" b="1" dirty="0">
-                <a:solidFill>
-                  <a:srgbClr val="000066"/>
-                </a:solidFill>
-              </a:rPr>
-              <a:t>/ 4 )</a:t>
+              <a:t>( 2 / 4 )</a:t>
             </a:r>
             <a:endParaRPr lang="vi-VN" sz="4800" b="1" dirty="0">
               <a:solidFill>
@@ -3813,23 +3787,7 @@
                   <a:srgbClr val="000066"/>
                 </a:solidFill>
               </a:rPr>
-              <a:t>( </a:t>
-            </a:r>
-            <a:r>
-              <a:rPr lang="en-US" sz="4800" b="1" dirty="0" smtClean="0">
-                <a:solidFill>
-                  <a:srgbClr val="000066"/>
-                </a:solidFill>
-              </a:rPr>
-              <a:t>3 </a:t>
-            </a:r>
-            <a:r>
-              <a:rPr lang="en-US" sz="4800" b="1" dirty="0">
-                <a:solidFill>
-                  <a:srgbClr val="000066"/>
-                </a:solidFill>
-              </a:rPr>
-              <a:t>/ 4 )</a:t>
+              <a:t>( 3 / 4 )</a:t>
             </a:r>
             <a:endParaRPr lang="vi-VN" sz="4800" b="1" dirty="0">
               <a:solidFill>
@@ -4073,23 +4031,7 @@
                   <a:srgbClr val="000066"/>
                 </a:solidFill>
               </a:rPr>
-              <a:t>( </a:t>
-            </a:r>
-            <a:r>
-              <a:rPr lang="en-US" sz="4800" b="1" dirty="0" smtClean="0">
-                <a:solidFill>
-                  <a:srgbClr val="000066"/>
-                </a:solidFill>
-              </a:rPr>
-              <a:t>4 </a:t>
-            </a:r>
-            <a:r>
-              <a:rPr lang="en-US" sz="4800" b="1" dirty="0">
-                <a:solidFill>
-                  <a:srgbClr val="000066"/>
-                </a:solidFill>
-              </a:rPr>
-              <a:t>/ 4 )</a:t>
+              <a:t>( 4 / 4 )</a:t>
             </a:r>
             <a:endParaRPr lang="vi-VN" sz="4800" b="1" dirty="0">
               <a:solidFill>
